--- a/Birim Test.pptx
+++ b/Birim Test.pptx
@@ -5,14 +5,15 @@
     <p:sldMasterId id="2147483702" r:id="rId1"/>
   </p:sldMasterIdLst>
   <p:sldIdLst>
-    <p:sldId id="256" r:id="rId2"/>
-    <p:sldId id="257" r:id="rId3"/>
-    <p:sldId id="258" r:id="rId4"/>
-    <p:sldId id="259" r:id="rId5"/>
-    <p:sldId id="260" r:id="rId6"/>
-    <p:sldId id="261" r:id="rId7"/>
-    <p:sldId id="262" r:id="rId8"/>
-    <p:sldId id="263" r:id="rId9"/>
+    <p:sldId id="264" r:id="rId2"/>
+    <p:sldId id="256" r:id="rId3"/>
+    <p:sldId id="257" r:id="rId4"/>
+    <p:sldId id="258" r:id="rId5"/>
+    <p:sldId id="259" r:id="rId6"/>
+    <p:sldId id="260" r:id="rId7"/>
+    <p:sldId id="261" r:id="rId8"/>
+    <p:sldId id="262" r:id="rId9"/>
+    <p:sldId id="263" r:id="rId10"/>
   </p:sldIdLst>
   <p:sldSz cx="9144000" cy="6858000" type="screen4x3"/>
   <p:notesSz cx="6858000" cy="9144000"/>
@@ -461,7 +462,7 @@
           <a:p>
             <a:fld id="{5BCAD085-E8A6-8845-BD4E-CB4CCA059FC4}" type="datetimeFigureOut">
               <a:rPr lang="en-US" smtClean="0"/>
-              <a:t>5/14/2026</a:t>
+              <a:t>5/15/2026</a:t>
             </a:fld>
             <a:endParaRPr lang="en-US"/>
           </a:p>
@@ -785,7 +786,7 @@
           <a:p>
             <a:fld id="{5BCAD085-E8A6-8845-BD4E-CB4CCA059FC4}" type="datetimeFigureOut">
               <a:rPr lang="en-US" smtClean="0"/>
-              <a:t>5/14/2026</a:t>
+              <a:t>5/15/2026</a:t>
             </a:fld>
             <a:endParaRPr lang="en-US"/>
           </a:p>
@@ -1033,7 +1034,7 @@
           <a:p>
             <a:fld id="{5BCAD085-E8A6-8845-BD4E-CB4CCA059FC4}" type="datetimeFigureOut">
               <a:rPr lang="en-US" smtClean="0"/>
-              <a:t>5/14/2026</a:t>
+              <a:t>5/15/2026</a:t>
             </a:fld>
             <a:endParaRPr lang="en-US"/>
           </a:p>
@@ -1372,7 +1373,7 @@
           <a:p>
             <a:fld id="{5BCAD085-E8A6-8845-BD4E-CB4CCA059FC4}" type="datetimeFigureOut">
               <a:rPr lang="en-US" smtClean="0"/>
-              <a:t>5/14/2026</a:t>
+              <a:t>5/15/2026</a:t>
             </a:fld>
             <a:endParaRPr lang="en-US"/>
           </a:p>
@@ -1719,7 +1720,7 @@
           <a:p>
             <a:fld id="{5BCAD085-E8A6-8845-BD4E-CB4CCA059FC4}" type="datetimeFigureOut">
               <a:rPr lang="en-US" smtClean="0"/>
-              <a:t>5/14/2026</a:t>
+              <a:t>5/15/2026</a:t>
             </a:fld>
             <a:endParaRPr lang="en-US"/>
           </a:p>
@@ -2093,7 +2094,7 @@
           <a:p>
             <a:fld id="{5BCAD085-E8A6-8845-BD4E-CB4CCA059FC4}" type="datetimeFigureOut">
               <a:rPr lang="en-US" smtClean="0"/>
-              <a:t>5/14/2026</a:t>
+              <a:t>5/15/2026</a:t>
             </a:fld>
             <a:endParaRPr lang="en-US"/>
           </a:p>
@@ -2563,7 +2564,7 @@
           <a:p>
             <a:fld id="{5BCAD085-E8A6-8845-BD4E-CB4CCA059FC4}" type="datetimeFigureOut">
               <a:rPr lang="en-US" smtClean="0"/>
-              <a:t>5/14/2026</a:t>
+              <a:t>5/15/2026</a:t>
             </a:fld>
             <a:endParaRPr lang="en-US"/>
           </a:p>
@@ -2773,7 +2774,7 @@
           <a:p>
             <a:fld id="{5BCAD085-E8A6-8845-BD4E-CB4CCA059FC4}" type="datetimeFigureOut">
               <a:rPr lang="en-US" smtClean="0"/>
-              <a:t>5/14/2026</a:t>
+              <a:t>5/15/2026</a:t>
             </a:fld>
             <a:endParaRPr lang="en-US"/>
           </a:p>
@@ -2984,7 +2985,7 @@
           <a:p>
             <a:fld id="{5BCAD085-E8A6-8845-BD4E-CB4CCA059FC4}" type="datetimeFigureOut">
               <a:rPr lang="en-US" smtClean="0"/>
-              <a:t>5/14/2026</a:t>
+              <a:t>5/15/2026</a:t>
             </a:fld>
             <a:endParaRPr lang="en-US"/>
           </a:p>
@@ -3216,7 +3217,7 @@
           <a:p>
             <a:fld id="{5BCAD085-E8A6-8845-BD4E-CB4CCA059FC4}" type="datetimeFigureOut">
               <a:rPr lang="en-US" smtClean="0"/>
-              <a:t>5/14/2026</a:t>
+              <a:t>5/15/2026</a:t>
             </a:fld>
             <a:endParaRPr lang="en-US"/>
           </a:p>
@@ -3464,7 +3465,7 @@
           <a:p>
             <a:fld id="{5BCAD085-E8A6-8845-BD4E-CB4CCA059FC4}" type="datetimeFigureOut">
               <a:rPr lang="en-US" smtClean="0"/>
-              <a:t>5/14/2026</a:t>
+              <a:t>5/15/2026</a:t>
             </a:fld>
             <a:endParaRPr lang="en-US"/>
           </a:p>
@@ -3767,7 +3768,7 @@
           <a:p>
             <a:fld id="{5BCAD085-E8A6-8845-BD4E-CB4CCA059FC4}" type="datetimeFigureOut">
               <a:rPr lang="en-US" smtClean="0"/>
-              <a:t>5/14/2026</a:t>
+              <a:t>5/15/2026</a:t>
             </a:fld>
             <a:endParaRPr lang="en-US"/>
           </a:p>
@@ -4149,7 +4150,7 @@
           <a:p>
             <a:fld id="{5BCAD085-E8A6-8845-BD4E-CB4CCA059FC4}" type="datetimeFigureOut">
               <a:rPr lang="en-US" smtClean="0"/>
-              <a:t>5/14/2026</a:t>
+              <a:t>5/15/2026</a:t>
             </a:fld>
             <a:endParaRPr lang="en-US"/>
           </a:p>
@@ -4303,7 +4304,7 @@
           <a:p>
             <a:fld id="{5BCAD085-E8A6-8845-BD4E-CB4CCA059FC4}" type="datetimeFigureOut">
               <a:rPr lang="en-US" smtClean="0"/>
-              <a:t>5/14/2026</a:t>
+              <a:t>5/15/2026</a:t>
             </a:fld>
             <a:endParaRPr lang="en-US"/>
           </a:p>
@@ -4429,7 +4430,7 @@
           <a:p>
             <a:fld id="{5BCAD085-E8A6-8845-BD4E-CB4CCA059FC4}" type="datetimeFigureOut">
               <a:rPr lang="en-US" smtClean="0"/>
-              <a:t>5/14/2026</a:t>
+              <a:t>5/15/2026</a:t>
             </a:fld>
             <a:endParaRPr lang="en-US"/>
           </a:p>
@@ -4684,7 +4685,7 @@
           <a:p>
             <a:fld id="{5BCAD085-E8A6-8845-BD4E-CB4CCA059FC4}" type="datetimeFigureOut">
               <a:rPr lang="en-US" smtClean="0"/>
-              <a:t>5/14/2026</a:t>
+              <a:t>5/15/2026</a:t>
             </a:fld>
             <a:endParaRPr lang="en-US"/>
           </a:p>
@@ -4998,7 +4999,7 @@
           <a:p>
             <a:fld id="{5BCAD085-E8A6-8845-BD4E-CB4CCA059FC4}" type="datetimeFigureOut">
               <a:rPr lang="en-US" smtClean="0"/>
-              <a:t>5/14/2026</a:t>
+              <a:t>5/15/2026</a:t>
             </a:fld>
             <a:endParaRPr lang="en-US"/>
           </a:p>
@@ -5158,6 +5159,13 @@
               <a:schemeClr val="lt1"/>
             </a:fontRef>
           </p:style>
+          <p:txBody>
+            <a:bodyPr/>
+            <a:lstStyle/>
+            <a:p>
+              <a:endParaRPr lang="tr-TR"/>
+            </a:p>
+          </p:txBody>
         </p:sp>
         <p:pic>
           <p:nvPicPr>
@@ -5349,7 +5357,7 @@
           <a:p>
             <a:fld id="{5BCAD085-E8A6-8845-BD4E-CB4CCA059FC4}" type="datetimeFigureOut">
               <a:rPr lang="en-US" smtClean="0"/>
-              <a:t>5/14/2026</a:t>
+              <a:t>5/15/2026</a:t>
             </a:fld>
             <a:endParaRPr lang="en-US"/>
           </a:p>
@@ -5894,12 +5902,18 @@
       </p:grpSpPr>
       <p:sp>
         <p:nvSpPr>
-          <p:cNvPr id="2" name="Title 1"/>
-          <p:cNvSpPr>
-            <a:spLocks noGrp="1"/>
-          </p:cNvSpPr>
-          <p:nvPr>
-            <p:ph type="title"/>
+          <p:cNvPr id="2" name="Başlık 1">
+            <a:extLst>
+              <a:ext uri="{FF2B5EF4-FFF2-40B4-BE49-F238E27FC236}">
+                <a16:creationId xmlns:a16="http://schemas.microsoft.com/office/drawing/2014/main" id="{59ADF4A6-C462-01CE-E913-E0A89EF3960D}"/>
+              </a:ext>
+            </a:extLst>
+          </p:cNvPr>
+          <p:cNvSpPr>
+            <a:spLocks noGrp="1"/>
+          </p:cNvSpPr>
+          <p:nvPr>
+            <p:ph type="ctrTitle"/>
           </p:nvPr>
         </p:nvSpPr>
         <p:spPr/>
@@ -5908,24 +5922,26 @@
           <a:lstStyle/>
           <a:p>
             <a:r>
-              <a:rPr dirty="0" err="1"/>
-              <a:t>Birim</a:t>
-            </a:r>
-            <a:r>
-              <a:rPr dirty="0"/>
-              <a:t> Test</a:t>
-            </a:r>
-          </a:p>
-        </p:txBody>
-      </p:sp>
-      <p:sp>
-        <p:nvSpPr>
-          <p:cNvPr id="3" name="Content Placeholder 2"/>
-          <p:cNvSpPr>
-            <a:spLocks noGrp="1"/>
-          </p:cNvSpPr>
-          <p:nvPr>
-            <p:ph idx="1"/>
+              <a:rPr lang="tr-TR" dirty="0"/>
+              <a:t>BİRİM TEST</a:t>
+            </a:r>
+          </a:p>
+        </p:txBody>
+      </p:sp>
+      <p:sp>
+        <p:nvSpPr>
+          <p:cNvPr id="3" name="Alt Başlık 2">
+            <a:extLst>
+              <a:ext uri="{FF2B5EF4-FFF2-40B4-BE49-F238E27FC236}">
+                <a16:creationId xmlns:a16="http://schemas.microsoft.com/office/drawing/2014/main" id="{67DA854D-41AC-1E23-55C1-3C0ECC269E32}"/>
+              </a:ext>
+            </a:extLst>
+          </p:cNvPr>
+          <p:cNvSpPr>
+            <a:spLocks noGrp="1"/>
+          </p:cNvSpPr>
+          <p:nvPr>
+            <p:ph type="subTitle" idx="1"/>
           </p:nvPr>
         </p:nvSpPr>
         <p:spPr/>
@@ -5934,22 +5950,34 @@
           <a:lstStyle/>
           <a:p>
             <a:r>
-              <a:t>Birim testi, yazılımın en küçük parçalarının doğrulanmasını sağlar.</a:t>
-            </a:r>
-          </a:p>
-          <a:p>
-            <a:r>
-              <a:t>Fonksiyon, metod veya sınıf seviyesinde yapılır.</a:t>
-            </a:r>
-          </a:p>
-          <a:p>
-            <a:r>
-              <a:t>Hataları erken aşamada yakalamaya yardımcı olur.</a:t>
+              <a:rPr lang="tr-TR" dirty="0"/>
+              <a:t>Ahmet Yusuf Birdir - 21360859026</a:t>
+            </a:r>
+          </a:p>
+          <a:p>
+            <a:r>
+              <a:rPr lang="tr-TR" dirty="0"/>
+              <a:t>Bursa Teknik Üniversitesi</a:t>
+            </a:r>
+          </a:p>
+          <a:p>
+            <a:r>
+              <a:rPr lang="tr-TR" dirty="0" err="1"/>
+              <a:t>Bilgisauar</a:t>
+            </a:r>
+            <a:r>
+              <a:rPr lang="tr-TR" dirty="0"/>
+              <a:t> Mühendisliği</a:t>
             </a:r>
           </a:p>
         </p:txBody>
       </p:sp>
     </p:spTree>
+    <p:extLst>
+      <p:ext uri="{BB962C8B-B14F-4D97-AF65-F5344CB8AC3E}">
+        <p14:creationId xmlns:p14="http://schemas.microsoft.com/office/powerpoint/2010/main" val="4047129924"/>
+      </p:ext>
+    </p:extLst>
   </p:cSld>
   <p:clrMapOvr>
     <a:masterClrMapping/>
@@ -5990,7 +6018,12 @@
           <a:lstStyle/>
           <a:p>
             <a:r>
-              <a:t>Birim Testlerinin Amaçları</a:t>
+              <a:rPr dirty="0" err="1"/>
+              <a:t>Birim</a:t>
+            </a:r>
+            <a:r>
+              <a:rPr dirty="0"/>
+              <a:t> Test</a:t>
             </a:r>
           </a:p>
         </p:txBody>
@@ -6011,95 +6044,18 @@
           <a:lstStyle/>
           <a:p>
             <a:r>
-              <a:rPr dirty="0" err="1"/>
-              <a:t>Kodun</a:t>
-            </a:r>
-            <a:r>
-              <a:rPr dirty="0"/>
-              <a:t> </a:t>
-            </a:r>
-            <a:r>
-              <a:rPr dirty="0" err="1"/>
-              <a:t>doğru</a:t>
-            </a:r>
-            <a:r>
-              <a:rPr dirty="0"/>
-              <a:t> </a:t>
-            </a:r>
-            <a:r>
-              <a:rPr dirty="0" err="1"/>
-              <a:t>çalıştığını</a:t>
-            </a:r>
-            <a:r>
-              <a:rPr dirty="0"/>
-              <a:t> </a:t>
-            </a:r>
-            <a:r>
-              <a:rPr dirty="0" err="1"/>
-              <a:t>doğrulamak</a:t>
-            </a:r>
-            <a:endParaRPr dirty="0"/>
-          </a:p>
-          <a:p>
-            <a:r>
-              <a:rPr dirty="0"/>
-              <a:t>Refactor </a:t>
-            </a:r>
-            <a:r>
-              <a:rPr dirty="0" err="1"/>
-              <a:t>işlemlerini</a:t>
-            </a:r>
-            <a:r>
-              <a:rPr dirty="0"/>
-              <a:t> </a:t>
-            </a:r>
-            <a:r>
-              <a:rPr dirty="0" err="1"/>
-              <a:t>güvenli</a:t>
-            </a:r>
-            <a:r>
-              <a:rPr dirty="0"/>
-              <a:t> hale </a:t>
-            </a:r>
-            <a:r>
-              <a:rPr dirty="0" err="1"/>
-              <a:t>getirmek</a:t>
-            </a:r>
-            <a:endParaRPr dirty="0"/>
-          </a:p>
-          <a:p>
-            <a:r>
-              <a:rPr dirty="0" err="1"/>
-              <a:t>Bakımı</a:t>
-            </a:r>
-            <a:r>
-              <a:rPr dirty="0"/>
-              <a:t> </a:t>
-            </a:r>
-            <a:r>
-              <a:rPr dirty="0" err="1"/>
-              <a:t>kolaylaştırmak</a:t>
-            </a:r>
-            <a:endParaRPr dirty="0"/>
-          </a:p>
-          <a:p>
-            <a:r>
-              <a:rPr dirty="0"/>
-              <a:t>Hata </a:t>
-            </a:r>
-            <a:r>
-              <a:rPr dirty="0" err="1"/>
-              <a:t>maliyetini</a:t>
-            </a:r>
-            <a:r>
-              <a:rPr dirty="0"/>
-              <a:t> </a:t>
-            </a:r>
-            <a:r>
-              <a:rPr dirty="0" err="1"/>
-              <a:t>azaltmak</a:t>
-            </a:r>
-            <a:endParaRPr dirty="0"/>
+              <a:t>Birim testi, yazılımın en küçük parçalarının doğrulanmasını sağlar.</a:t>
+            </a:r>
+          </a:p>
+          <a:p>
+            <a:r>
+              <a:t>Fonksiyon, metod veya sınıf seviyesinde yapılır.</a:t>
+            </a:r>
+          </a:p>
+          <a:p>
+            <a:r>
+              <a:t>Hataları erken aşamada yakalamaya yardımcı olur.</a:t>
+            </a:r>
           </a:p>
         </p:txBody>
       </p:sp>
@@ -6144,7 +6100,7 @@
           <a:lstStyle/>
           <a:p>
             <a:r>
-              <a:t>Birim Testlerinin Avantajları</a:t>
+              <a:t>Birim Testlerinin Amaçları</a:t>
             </a:r>
           </a:p>
         </p:txBody>
@@ -6165,23 +6121,95 @@
           <a:lstStyle/>
           <a:p>
             <a:r>
-              <a:t>Yazılım kalitesini artırır</a:t>
-            </a:r>
-          </a:p>
-          <a:p>
-            <a:r>
-              <a:t>Debug süresini azaltır</a:t>
-            </a:r>
-          </a:p>
-          <a:p>
-            <a:r>
-              <a:t>Dokümantasyon görevi görür</a:t>
-            </a:r>
-          </a:p>
-          <a:p>
-            <a:r>
-              <a:t>CI/CD süreçlerine kolay entegre edilir</a:t>
-            </a:r>
+              <a:rPr dirty="0" err="1"/>
+              <a:t>Kodun</a:t>
+            </a:r>
+            <a:r>
+              <a:rPr dirty="0"/>
+              <a:t> </a:t>
+            </a:r>
+            <a:r>
+              <a:rPr dirty="0" err="1"/>
+              <a:t>doğru</a:t>
+            </a:r>
+            <a:r>
+              <a:rPr dirty="0"/>
+              <a:t> </a:t>
+            </a:r>
+            <a:r>
+              <a:rPr dirty="0" err="1"/>
+              <a:t>çalıştığını</a:t>
+            </a:r>
+            <a:r>
+              <a:rPr dirty="0"/>
+              <a:t> </a:t>
+            </a:r>
+            <a:r>
+              <a:rPr dirty="0" err="1"/>
+              <a:t>doğrulamak</a:t>
+            </a:r>
+            <a:endParaRPr dirty="0"/>
+          </a:p>
+          <a:p>
+            <a:r>
+              <a:rPr dirty="0"/>
+              <a:t>Refactor </a:t>
+            </a:r>
+            <a:r>
+              <a:rPr dirty="0" err="1"/>
+              <a:t>işlemlerini</a:t>
+            </a:r>
+            <a:r>
+              <a:rPr dirty="0"/>
+              <a:t> </a:t>
+            </a:r>
+            <a:r>
+              <a:rPr dirty="0" err="1"/>
+              <a:t>güvenli</a:t>
+            </a:r>
+            <a:r>
+              <a:rPr dirty="0"/>
+              <a:t> hale </a:t>
+            </a:r>
+            <a:r>
+              <a:rPr dirty="0" err="1"/>
+              <a:t>getirmek</a:t>
+            </a:r>
+            <a:endParaRPr dirty="0"/>
+          </a:p>
+          <a:p>
+            <a:r>
+              <a:rPr dirty="0" err="1"/>
+              <a:t>Bakımı</a:t>
+            </a:r>
+            <a:r>
+              <a:rPr dirty="0"/>
+              <a:t> </a:t>
+            </a:r>
+            <a:r>
+              <a:rPr dirty="0" err="1"/>
+              <a:t>kolaylaştırmak</a:t>
+            </a:r>
+            <a:endParaRPr dirty="0"/>
+          </a:p>
+          <a:p>
+            <a:r>
+              <a:rPr dirty="0"/>
+              <a:t>Hata </a:t>
+            </a:r>
+            <a:r>
+              <a:rPr dirty="0" err="1"/>
+              <a:t>maliyetini</a:t>
+            </a:r>
+            <a:r>
+              <a:rPr dirty="0"/>
+              <a:t> </a:t>
+            </a:r>
+            <a:r>
+              <a:rPr dirty="0" err="1"/>
+              <a:t>azaltmak</a:t>
+            </a:r>
+            <a:endParaRPr dirty="0"/>
           </a:p>
         </p:txBody>
       </p:sp>
@@ -6226,7 +6254,7 @@
           <a:lstStyle/>
           <a:p>
             <a:r>
-              <a:t>Birim Test Süreci</a:t>
+              <a:t>Birim Testlerinin Avantajları</a:t>
             </a:r>
           </a:p>
         </p:txBody>
@@ -6247,22 +6275,22 @@
           <a:lstStyle/>
           <a:p>
             <a:r>
-              <a:t>Test senaryoları hazırlanır</a:t>
-            </a:r>
-          </a:p>
-          <a:p>
-            <a:r>
-              <a:t>Beklenen çıktı belirlenir</a:t>
-            </a:r>
-          </a:p>
-          <a:p>
-            <a:r>
-              <a:t>Test çalıştırılır</a:t>
-            </a:r>
-          </a:p>
-          <a:p>
-            <a:r>
-              <a:t>Sonuçlar değerlendirilir</a:t>
+              <a:t>Yazılım kalitesini artırır</a:t>
+            </a:r>
+          </a:p>
+          <a:p>
+            <a:r>
+              <a:t>Debug süresini azaltır</a:t>
+            </a:r>
+          </a:p>
+          <a:p>
+            <a:r>
+              <a:t>Dokümantasyon görevi görür</a:t>
+            </a:r>
+          </a:p>
+          <a:p>
+            <a:r>
+              <a:t>CI/CD süreçlerine kolay entegre edilir</a:t>
             </a:r>
           </a:p>
         </p:txBody>
@@ -6304,13 +6332,11 @@
         </p:nvSpPr>
         <p:spPr/>
         <p:txBody>
-          <a:bodyPr>
-            <a:normAutofit fontScale="90000"/>
-          </a:bodyPr>
-          <a:lstStyle/>
-          <a:p>
-            <a:r>
-              <a:t>Popüler Birim Test Frameworkleri</a:t>
+          <a:bodyPr/>
+          <a:lstStyle/>
+          <a:p>
+            <a:r>
+              <a:t>Birim Test Süreci</a:t>
             </a:r>
           </a:p>
         </p:txBody>
@@ -6331,22 +6357,22 @@
           <a:lstStyle/>
           <a:p>
             <a:r>
-              <a:t>Java: JUnit</a:t>
-            </a:r>
-          </a:p>
-          <a:p>
-            <a:r>
-              <a:t>Python: PyTest, unittest</a:t>
-            </a:r>
-          </a:p>
-          <a:p>
-            <a:r>
-              <a:t>JavaScript: Jest</a:t>
-            </a:r>
-          </a:p>
-          <a:p>
-            <a:r>
-              <a:t>C#: NUnit, xUnit</a:t>
+              <a:t>Test senaryoları hazırlanır</a:t>
+            </a:r>
+          </a:p>
+          <a:p>
+            <a:r>
+              <a:t>Beklenen çıktı belirlenir</a:t>
+            </a:r>
+          </a:p>
+          <a:p>
+            <a:r>
+              <a:t>Test çalıştırılır</a:t>
+            </a:r>
+          </a:p>
+          <a:p>
+            <a:r>
+              <a:t>Sonuçlar değerlendirilir</a:t>
             </a:r>
           </a:p>
         </p:txBody>
@@ -6388,11 +6414,13 @@
         </p:nvSpPr>
         <p:spPr/>
         <p:txBody>
-          <a:bodyPr/>
-          <a:lstStyle/>
-          <a:p>
-            <a:r>
-              <a:t>Örnek Birim Testi</a:t>
+          <a:bodyPr>
+            <a:normAutofit fontScale="90000"/>
+          </a:bodyPr>
+          <a:lstStyle/>
+          <a:p>
+            <a:r>
+              <a:t>Popüler Birim Test Frameworkleri</a:t>
             </a:r>
           </a:p>
         </p:txBody>
@@ -6413,105 +6441,23 @@
           <a:lstStyle/>
           <a:p>
             <a:r>
-              <a:rPr dirty="0"/>
-              <a:t>Bir </a:t>
-            </a:r>
-            <a:r>
-              <a:rPr dirty="0" err="1"/>
-              <a:t>toplama</a:t>
-            </a:r>
-            <a:r>
-              <a:rPr dirty="0"/>
-              <a:t> </a:t>
-            </a:r>
-            <a:r>
-              <a:rPr dirty="0" err="1"/>
-              <a:t>fonksiyonu</a:t>
-            </a:r>
-            <a:r>
-              <a:rPr dirty="0"/>
-              <a:t> </a:t>
-            </a:r>
-            <a:r>
-              <a:rPr dirty="0" err="1"/>
-              <a:t>için</a:t>
-            </a:r>
-            <a:r>
-              <a:rPr dirty="0"/>
-              <a:t> test </a:t>
-            </a:r>
-            <a:r>
-              <a:rPr dirty="0" err="1"/>
-              <a:t>örneği</a:t>
-            </a:r>
-            <a:endParaRPr dirty="0"/>
-          </a:p>
-          <a:p>
-            <a:r>
-              <a:rPr dirty="0" err="1"/>
-              <a:t>Girdi</a:t>
-            </a:r>
-            <a:r>
-              <a:rPr dirty="0"/>
-              <a:t>: 2 + 3</a:t>
-            </a:r>
-          </a:p>
-          <a:p>
-            <a:r>
-              <a:rPr dirty="0" err="1"/>
-              <a:t>Beklenen</a:t>
-            </a:r>
-            <a:r>
-              <a:rPr dirty="0"/>
-              <a:t> </a:t>
-            </a:r>
-            <a:r>
-              <a:rPr dirty="0" err="1"/>
-              <a:t>çıktı</a:t>
-            </a:r>
-            <a:r>
-              <a:rPr dirty="0"/>
-              <a:t>: 5</a:t>
-            </a:r>
-          </a:p>
-          <a:p>
-            <a:r>
-              <a:rPr dirty="0" err="1"/>
-              <a:t>Başarılı</a:t>
-            </a:r>
-            <a:r>
-              <a:rPr dirty="0"/>
-              <a:t> </a:t>
-            </a:r>
-            <a:r>
-              <a:rPr dirty="0" err="1"/>
-              <a:t>sonuç</a:t>
-            </a:r>
-            <a:r>
-              <a:rPr dirty="0"/>
-              <a:t> </a:t>
-            </a:r>
-            <a:r>
-              <a:rPr dirty="0" err="1"/>
-              <a:t>testin</a:t>
-            </a:r>
-            <a:r>
-              <a:rPr dirty="0"/>
-              <a:t> </a:t>
-            </a:r>
-            <a:r>
-              <a:rPr dirty="0" err="1"/>
-              <a:t>geçtiğini</a:t>
-            </a:r>
-            <a:r>
-              <a:rPr dirty="0"/>
-              <a:t> </a:t>
-            </a:r>
-            <a:r>
-              <a:rPr dirty="0" err="1"/>
-              <a:t>gösterir</a:t>
-            </a:r>
-            <a:endParaRPr dirty="0"/>
+              <a:t>Java: JUnit</a:t>
+            </a:r>
+          </a:p>
+          <a:p>
+            <a:r>
+              <a:t>Python: PyTest, unittest</a:t>
+            </a:r>
+          </a:p>
+          <a:p>
+            <a:r>
+              <a:t>JavaScript: Jest</a:t>
+            </a:r>
+          </a:p>
+          <a:p>
+            <a:r>
+              <a:t>C#: NUnit, xUnit</a:t>
+            </a:r>
           </a:p>
         </p:txBody>
       </p:sp>
@@ -6552,14 +6498,37 @@
         </p:nvSpPr>
         <p:spPr/>
         <p:txBody>
-          <a:bodyPr>
-            <a:normAutofit fontScale="90000"/>
-          </a:bodyPr>
-          <a:lstStyle/>
-          <a:p>
+          <a:bodyPr/>
+          <a:lstStyle/>
+          <a:p>
+            <a:r>
+              <a:t>Örnek Birim Testi</a:t>
+            </a:r>
+          </a:p>
+        </p:txBody>
+      </p:sp>
+      <p:sp>
+        <p:nvSpPr>
+          <p:cNvPr id="3" name="Content Placeholder 2"/>
+          <p:cNvSpPr>
+            <a:spLocks noGrp="1"/>
+          </p:cNvSpPr>
+          <p:nvPr>
+            <p:ph idx="1"/>
+          </p:nvPr>
+        </p:nvSpPr>
+        <p:spPr/>
+        <p:txBody>
+          <a:bodyPr/>
+          <a:lstStyle/>
+          <a:p>
+            <a:r>
+              <a:rPr dirty="0"/>
+              <a:t>Bir </a:t>
+            </a:r>
             <a:r>
               <a:rPr dirty="0" err="1"/>
-              <a:t>Birim</a:t>
+              <a:t>toplama</a:t>
             </a:r>
             <a:r>
               <a:rPr dirty="0"/>
@@ -6567,7 +6536,7 @@
             </a:r>
             <a:r>
               <a:rPr dirty="0" err="1"/>
-              <a:t>Testlerinde</a:t>
+              <a:t>fonksiyonu</a:t>
             </a:r>
             <a:r>
               <a:rPr dirty="0"/>
@@ -6575,7 +6544,32 @@
             </a:r>
             <a:r>
               <a:rPr dirty="0" err="1"/>
-              <a:t>Dikkat</a:t>
+              <a:t>için</a:t>
+            </a:r>
+            <a:r>
+              <a:rPr dirty="0"/>
+              <a:t> test </a:t>
+            </a:r>
+            <a:r>
+              <a:rPr dirty="0" err="1"/>
+              <a:t>örneği</a:t>
+            </a:r>
+            <a:endParaRPr dirty="0"/>
+          </a:p>
+          <a:p>
+            <a:r>
+              <a:rPr dirty="0" err="1"/>
+              <a:t>Girdi</a:t>
+            </a:r>
+            <a:r>
+              <a:rPr dirty="0"/>
+              <a:t>: 2 + 3</a:t>
+            </a:r>
+          </a:p>
+          <a:p>
+            <a:r>
+              <a:rPr dirty="0" err="1"/>
+              <a:t>Beklenen</a:t>
             </a:r>
             <a:r>
               <a:rPr dirty="0"/>
@@ -6583,30 +6577,17 @@
             </a:r>
             <a:r>
               <a:rPr dirty="0" err="1"/>
-              <a:t>Edilecekler</a:t>
-            </a:r>
-            <a:endParaRPr dirty="0"/>
-          </a:p>
-        </p:txBody>
-      </p:sp>
-      <p:sp>
-        <p:nvSpPr>
-          <p:cNvPr id="3" name="Content Placeholder 2"/>
-          <p:cNvSpPr>
-            <a:spLocks noGrp="1"/>
-          </p:cNvSpPr>
-          <p:nvPr>
-            <p:ph idx="1"/>
-          </p:nvPr>
-        </p:nvSpPr>
-        <p:spPr/>
-        <p:txBody>
-          <a:bodyPr/>
-          <a:lstStyle/>
+              <a:t>çıktı</a:t>
+            </a:r>
+            <a:r>
+              <a:rPr dirty="0"/>
+              <a:t>: 5</a:t>
+            </a:r>
+          </a:p>
           <a:p>
             <a:r>
               <a:rPr dirty="0" err="1"/>
-              <a:t>Testler</a:t>
+              <a:t>Başarılı</a:t>
             </a:r>
             <a:r>
               <a:rPr dirty="0"/>
@@ -6614,7 +6595,7 @@
             </a:r>
             <a:r>
               <a:rPr dirty="0" err="1"/>
-              <a:t>bağımsız</a:t>
+              <a:t>sonuç</a:t>
             </a:r>
             <a:r>
               <a:rPr dirty="0"/>
@@ -6622,18 +6603,7 @@
             </a:r>
             <a:r>
               <a:rPr dirty="0" err="1"/>
-              <a:t>olmalıdır</a:t>
-            </a:r>
-            <a:endParaRPr dirty="0"/>
-          </a:p>
-          <a:p>
-            <a:r>
-              <a:rPr dirty="0"/>
-              <a:t>Tek </a:t>
-            </a:r>
-            <a:r>
-              <a:rPr dirty="0" err="1"/>
-              <a:t>bir</a:t>
+              <a:t>testin</a:t>
             </a:r>
             <a:r>
               <a:rPr dirty="0"/>
@@ -6641,22 +6611,7 @@
             </a:r>
             <a:r>
               <a:rPr dirty="0" err="1"/>
-              <a:t>davranış</a:t>
-            </a:r>
-            <a:r>
-              <a:rPr dirty="0"/>
-              <a:t> test </a:t>
-            </a:r>
-            <a:r>
-              <a:rPr dirty="0" err="1"/>
-              <a:t>edilmelidir</a:t>
-            </a:r>
-            <a:endParaRPr dirty="0"/>
-          </a:p>
-          <a:p>
-            <a:r>
-              <a:rPr dirty="0" err="1"/>
-              <a:t>Anlaşılır</a:t>
+              <a:t>geçtiğini</a:t>
             </a:r>
             <a:r>
               <a:rPr dirty="0"/>
@@ -6664,19 +6619,7 @@
             </a:r>
             <a:r>
               <a:rPr dirty="0" err="1"/>
-              <a:t>isimlendirme</a:t>
-            </a:r>
-            <a:r>
-              <a:rPr dirty="0"/>
-              <a:t> </a:t>
-            </a:r>
-            <a:r>
-              <a:rPr dirty="0" err="1"/>
-              <a:t>kullanılmalıdı</a:t>
-            </a:r>
-            <a:r>
-              <a:rPr lang="tr-TR" dirty="0"/>
-              <a:t>r</a:t>
+              <a:t>gösterir</a:t>
             </a:r>
             <a:endParaRPr dirty="0"/>
           </a:p>
@@ -6691,6 +6634,173 @@
 </file>
 
 <file path=ppt/slides/slide8.xml><?xml version="1.0" encoding="utf-8"?>
+<p:sld xmlns:a="http://schemas.openxmlformats.org/drawingml/2006/main" xmlns:r="http://schemas.openxmlformats.org/officeDocument/2006/relationships" xmlns:p="http://schemas.openxmlformats.org/presentationml/2006/main">
+  <p:cSld>
+    <p:spTree>
+      <p:nvGrpSpPr>
+        <p:cNvPr id="1" name=""/>
+        <p:cNvGrpSpPr/>
+        <p:nvPr/>
+      </p:nvGrpSpPr>
+      <p:grpSpPr>
+        <a:xfrm>
+          <a:off x="0" y="0"/>
+          <a:ext cx="0" cy="0"/>
+          <a:chOff x="0" y="0"/>
+          <a:chExt cx="0" cy="0"/>
+        </a:xfrm>
+      </p:grpSpPr>
+      <p:sp>
+        <p:nvSpPr>
+          <p:cNvPr id="2" name="Title 1"/>
+          <p:cNvSpPr>
+            <a:spLocks noGrp="1"/>
+          </p:cNvSpPr>
+          <p:nvPr>
+            <p:ph type="title"/>
+          </p:nvPr>
+        </p:nvSpPr>
+        <p:spPr/>
+        <p:txBody>
+          <a:bodyPr>
+            <a:normAutofit fontScale="90000"/>
+          </a:bodyPr>
+          <a:lstStyle/>
+          <a:p>
+            <a:r>
+              <a:rPr dirty="0" err="1"/>
+              <a:t>Birim</a:t>
+            </a:r>
+            <a:r>
+              <a:rPr dirty="0"/>
+              <a:t> </a:t>
+            </a:r>
+            <a:r>
+              <a:rPr dirty="0" err="1"/>
+              <a:t>Testlerinde</a:t>
+            </a:r>
+            <a:r>
+              <a:rPr dirty="0"/>
+              <a:t> </a:t>
+            </a:r>
+            <a:r>
+              <a:rPr dirty="0" err="1"/>
+              <a:t>Dikkat</a:t>
+            </a:r>
+            <a:r>
+              <a:rPr dirty="0"/>
+              <a:t> </a:t>
+            </a:r>
+            <a:r>
+              <a:rPr dirty="0" err="1"/>
+              <a:t>Edilecekler</a:t>
+            </a:r>
+            <a:endParaRPr dirty="0"/>
+          </a:p>
+        </p:txBody>
+      </p:sp>
+      <p:sp>
+        <p:nvSpPr>
+          <p:cNvPr id="3" name="Content Placeholder 2"/>
+          <p:cNvSpPr>
+            <a:spLocks noGrp="1"/>
+          </p:cNvSpPr>
+          <p:nvPr>
+            <p:ph idx="1"/>
+          </p:nvPr>
+        </p:nvSpPr>
+        <p:spPr/>
+        <p:txBody>
+          <a:bodyPr/>
+          <a:lstStyle/>
+          <a:p>
+            <a:r>
+              <a:rPr dirty="0" err="1"/>
+              <a:t>Testler</a:t>
+            </a:r>
+            <a:r>
+              <a:rPr dirty="0"/>
+              <a:t> </a:t>
+            </a:r>
+            <a:r>
+              <a:rPr dirty="0" err="1"/>
+              <a:t>bağımsız</a:t>
+            </a:r>
+            <a:r>
+              <a:rPr dirty="0"/>
+              <a:t> </a:t>
+            </a:r>
+            <a:r>
+              <a:rPr dirty="0" err="1"/>
+              <a:t>olmalıdır</a:t>
+            </a:r>
+            <a:endParaRPr dirty="0"/>
+          </a:p>
+          <a:p>
+            <a:r>
+              <a:rPr dirty="0"/>
+              <a:t>Tek </a:t>
+            </a:r>
+            <a:r>
+              <a:rPr dirty="0" err="1"/>
+              <a:t>bir</a:t>
+            </a:r>
+            <a:r>
+              <a:rPr dirty="0"/>
+              <a:t> </a:t>
+            </a:r>
+            <a:r>
+              <a:rPr dirty="0" err="1"/>
+              <a:t>davranış</a:t>
+            </a:r>
+            <a:r>
+              <a:rPr dirty="0"/>
+              <a:t> test </a:t>
+            </a:r>
+            <a:r>
+              <a:rPr dirty="0" err="1"/>
+              <a:t>edilmelidir</a:t>
+            </a:r>
+            <a:endParaRPr dirty="0"/>
+          </a:p>
+          <a:p>
+            <a:r>
+              <a:rPr dirty="0" err="1"/>
+              <a:t>Anlaşılır</a:t>
+            </a:r>
+            <a:r>
+              <a:rPr dirty="0"/>
+              <a:t> </a:t>
+            </a:r>
+            <a:r>
+              <a:rPr dirty="0" err="1"/>
+              <a:t>isimlendirme</a:t>
+            </a:r>
+            <a:r>
+              <a:rPr dirty="0"/>
+              <a:t> </a:t>
+            </a:r>
+            <a:r>
+              <a:rPr dirty="0" err="1"/>
+              <a:t>kullanılmalıdı</a:t>
+            </a:r>
+            <a:r>
+              <a:rPr lang="tr-TR" dirty="0"/>
+              <a:t>r</a:t>
+            </a:r>
+            <a:endParaRPr dirty="0"/>
+          </a:p>
+        </p:txBody>
+      </p:sp>
+    </p:spTree>
+  </p:cSld>
+  <p:clrMapOvr>
+    <a:masterClrMapping/>
+  </p:clrMapOvr>
+</p:sld>
+</file>
+
+<file path=ppt/slides/slide9.xml><?xml version="1.0" encoding="utf-8"?>
 <p:sld xmlns:a="http://schemas.openxmlformats.org/drawingml/2006/main" xmlns:r="http://schemas.openxmlformats.org/officeDocument/2006/relationships" xmlns:p="http://schemas.openxmlformats.org/presentationml/2006/main">
   <p:cSld>
     <p:spTree>

--- a/Birim Test.pptx
+++ b/Birim Test.pptx
@@ -14,6 +14,7 @@
     <p:sldId id="261" r:id="rId8"/>
     <p:sldId id="262" r:id="rId9"/>
     <p:sldId id="263" r:id="rId10"/>
+    <p:sldId id="265" r:id="rId11"/>
   </p:sldIdLst>
   <p:sldSz cx="9144000" cy="6858000" type="screen4x3"/>
   <p:notesSz cx="6858000" cy="9144000"/>
@@ -225,6 +226,13 @@
               <a:schemeClr val="lt1"/>
             </a:fontRef>
           </p:style>
+          <p:txBody>
+            <a:bodyPr/>
+            <a:lstStyle/>
+            <a:p>
+              <a:endParaRPr lang="tr-TR"/>
+            </a:p>
+          </p:txBody>
         </p:sp>
         <p:pic>
           <p:nvPicPr>
@@ -5985,6 +5993,65 @@
 </p:sld>
 </file>
 
+<file path=ppt/slides/slide10.xml><?xml version="1.0" encoding="utf-8"?>
+<p:sld xmlns:a="http://schemas.openxmlformats.org/drawingml/2006/main" xmlns:r="http://schemas.openxmlformats.org/officeDocument/2006/relationships" xmlns:p="http://schemas.openxmlformats.org/presentationml/2006/main">
+  <p:cSld>
+    <p:spTree>
+      <p:nvGrpSpPr>
+        <p:cNvPr id="1" name=""/>
+        <p:cNvGrpSpPr/>
+        <p:nvPr/>
+      </p:nvGrpSpPr>
+      <p:grpSpPr>
+        <a:xfrm>
+          <a:off x="0" y="0"/>
+          <a:ext cx="0" cy="0"/>
+          <a:chOff x="0" y="0"/>
+          <a:chExt cx="0" cy="0"/>
+        </a:xfrm>
+      </p:grpSpPr>
+      <p:sp>
+        <p:nvSpPr>
+          <p:cNvPr id="2" name="Başlık 1">
+            <a:extLst>
+              <a:ext uri="{FF2B5EF4-FFF2-40B4-BE49-F238E27FC236}">
+                <a16:creationId xmlns:a16="http://schemas.microsoft.com/office/drawing/2014/main" id="{659BE756-194B-8A5E-9448-B44EC024F73D}"/>
+              </a:ext>
+            </a:extLst>
+          </p:cNvPr>
+          <p:cNvSpPr>
+            <a:spLocks noGrp="1"/>
+          </p:cNvSpPr>
+          <p:nvPr>
+            <p:ph type="ctrTitle"/>
+          </p:nvPr>
+        </p:nvSpPr>
+        <p:spPr/>
+        <p:txBody>
+          <a:bodyPr/>
+          <a:lstStyle/>
+          <a:p>
+            <a:r>
+              <a:rPr lang="tr-TR"/>
+              <a:t>Dinlediğiniz için Teşekkürler</a:t>
+            </a:r>
+            <a:endParaRPr lang="tr-TR" dirty="0"/>
+          </a:p>
+        </p:txBody>
+      </p:sp>
+    </p:spTree>
+    <p:extLst>
+      <p:ext uri="{BB962C8B-B14F-4D97-AF65-F5344CB8AC3E}">
+        <p14:creationId xmlns:p14="http://schemas.microsoft.com/office/powerpoint/2010/main" val="1208618596"/>
+      </p:ext>
+    </p:extLst>
+  </p:cSld>
+  <p:clrMapOvr>
+    <a:masterClrMapping/>
+  </p:clrMapOvr>
+</p:sld>
+</file>
+
 <file path=ppt/slides/slide2.xml><?xml version="1.0" encoding="utf-8"?>
 <p:sld xmlns:a="http://schemas.openxmlformats.org/drawingml/2006/main" xmlns:r="http://schemas.openxmlformats.org/officeDocument/2006/relationships" xmlns:p="http://schemas.openxmlformats.org/presentationml/2006/main">
   <p:cSld>
@@ -6441,23 +6508,53 @@
           <a:lstStyle/>
           <a:p>
             <a:r>
+              <a:rPr dirty="0"/>
               <a:t>Java: JUnit</a:t>
             </a:r>
           </a:p>
           <a:p>
             <a:r>
-              <a:t>Python: PyTest, unittest</a:t>
-            </a:r>
-          </a:p>
-          <a:p>
-            <a:r>
+              <a:rPr dirty="0"/>
+              <a:t>Python: </a:t>
+            </a:r>
+            <a:r>
+              <a:rPr dirty="0" err="1"/>
+              <a:t>PyTest</a:t>
+            </a:r>
+            <a:r>
+              <a:rPr dirty="0"/>
+              <a:t>, </a:t>
+            </a:r>
+            <a:r>
+              <a:rPr dirty="0" err="1"/>
+              <a:t>unittest</a:t>
+            </a:r>
+            <a:endParaRPr dirty="0"/>
+          </a:p>
+          <a:p>
+            <a:r>
+              <a:rPr dirty="0"/>
               <a:t>JavaScript: Jest</a:t>
             </a:r>
           </a:p>
           <a:p>
             <a:r>
-              <a:t>C#: NUnit, xUnit</a:t>
-            </a:r>
+              <a:rPr dirty="0"/>
+              <a:t>C#: </a:t>
+            </a:r>
+            <a:r>
+              <a:rPr dirty="0" err="1"/>
+              <a:t>NUnit</a:t>
+            </a:r>
+            <a:r>
+              <a:rPr dirty="0"/>
+              <a:t>, </a:t>
+            </a:r>
+            <a:r>
+              <a:rPr dirty="0" err="1"/>
+              <a:t>xUnit</a:t>
+            </a:r>
+            <a:endParaRPr dirty="0"/>
           </a:p>
         </p:txBody>
       </p:sp>
@@ -6502,129 +6599,52 @@
           <a:lstStyle/>
           <a:p>
             <a:r>
-              <a:t>Örnek Birim Testi</a:t>
-            </a:r>
-          </a:p>
-        </p:txBody>
-      </p:sp>
-      <p:sp>
-        <p:nvSpPr>
-          <p:cNvPr id="3" name="Content Placeholder 2"/>
-          <p:cNvSpPr>
-            <a:spLocks noGrp="1"/>
-          </p:cNvSpPr>
+              <a:rPr dirty="0"/>
+              <a:t>Örnek </a:t>
+            </a:r>
+            <a:r>
+              <a:rPr dirty="0" err="1"/>
+              <a:t>Birim</a:t>
+            </a:r>
+            <a:r>
+              <a:rPr dirty="0"/>
+              <a:t> Testi</a:t>
+            </a:r>
+          </a:p>
+        </p:txBody>
+      </p:sp>
+      <p:pic>
+        <p:nvPicPr>
+          <p:cNvPr id="5" name="İçerik Yer Tutucusu 4">
+            <a:extLst>
+              <a:ext uri="{FF2B5EF4-FFF2-40B4-BE49-F238E27FC236}">
+                <a16:creationId xmlns:a16="http://schemas.microsoft.com/office/drawing/2014/main" id="{F03A4950-DF4E-CC25-7503-959873400DBA}"/>
+              </a:ext>
+            </a:extLst>
+          </p:cNvPr>
+          <p:cNvPicPr>
+            <a:picLocks noGrp="1" noChangeAspect="1"/>
+          </p:cNvPicPr>
           <p:nvPr>
             <p:ph idx="1"/>
           </p:nvPr>
-        </p:nvSpPr>
-        <p:spPr/>
-        <p:txBody>
-          <a:bodyPr/>
-          <a:lstStyle/>
-          <a:p>
-            <a:r>
-              <a:rPr dirty="0"/>
-              <a:t>Bir </a:t>
-            </a:r>
-            <a:r>
-              <a:rPr dirty="0" err="1"/>
-              <a:t>toplama</a:t>
-            </a:r>
-            <a:r>
-              <a:rPr dirty="0"/>
-              <a:t> </a:t>
-            </a:r>
-            <a:r>
-              <a:rPr dirty="0" err="1"/>
-              <a:t>fonksiyonu</a:t>
-            </a:r>
-            <a:r>
-              <a:rPr dirty="0"/>
-              <a:t> </a:t>
-            </a:r>
-            <a:r>
-              <a:rPr dirty="0" err="1"/>
-              <a:t>için</a:t>
-            </a:r>
-            <a:r>
-              <a:rPr dirty="0"/>
-              <a:t> test </a:t>
-            </a:r>
-            <a:r>
-              <a:rPr dirty="0" err="1"/>
-              <a:t>örneği</a:t>
-            </a:r>
-            <a:endParaRPr dirty="0"/>
-          </a:p>
-          <a:p>
-            <a:r>
-              <a:rPr dirty="0" err="1"/>
-              <a:t>Girdi</a:t>
-            </a:r>
-            <a:r>
-              <a:rPr dirty="0"/>
-              <a:t>: 2 + 3</a:t>
-            </a:r>
-          </a:p>
-          <a:p>
-            <a:r>
-              <a:rPr dirty="0" err="1"/>
-              <a:t>Beklenen</a:t>
-            </a:r>
-            <a:r>
-              <a:rPr dirty="0"/>
-              <a:t> </a:t>
-            </a:r>
-            <a:r>
-              <a:rPr dirty="0" err="1"/>
-              <a:t>çıktı</a:t>
-            </a:r>
-            <a:r>
-              <a:rPr dirty="0"/>
-              <a:t>: 5</a:t>
-            </a:r>
-          </a:p>
-          <a:p>
-            <a:r>
-              <a:rPr dirty="0" err="1"/>
-              <a:t>Başarılı</a:t>
-            </a:r>
-            <a:r>
-              <a:rPr dirty="0"/>
-              <a:t> </a:t>
-            </a:r>
-            <a:r>
-              <a:rPr dirty="0" err="1"/>
-              <a:t>sonuç</a:t>
-            </a:r>
-            <a:r>
-              <a:rPr dirty="0"/>
-              <a:t> </a:t>
-            </a:r>
-            <a:r>
-              <a:rPr dirty="0" err="1"/>
-              <a:t>testin</a:t>
-            </a:r>
-            <a:r>
-              <a:rPr dirty="0"/>
-              <a:t> </a:t>
-            </a:r>
-            <a:r>
-              <a:rPr dirty="0" err="1"/>
-              <a:t>geçtiğini</a:t>
-            </a:r>
-            <a:r>
-              <a:rPr dirty="0"/>
-              <a:t> </a:t>
-            </a:r>
-            <a:r>
-              <a:rPr dirty="0" err="1"/>
-              <a:t>gösterir</a:t>
-            </a:r>
-            <a:endParaRPr dirty="0"/>
-          </a:p>
-        </p:txBody>
-      </p:sp>
+        </p:nvPicPr>
+        <p:blipFill>
+          <a:blip r:embed="rId2"/>
+          <a:stretch>
+            <a:fillRect/>
+          </a:stretch>
+        </p:blipFill>
+        <p:spPr>
+          <a:xfrm>
+            <a:off x="987789" y="2875085"/>
+            <a:ext cx="7168422" cy="2963007"/>
+          </a:xfrm>
+          <a:prstGeom prst="rect">
+            <a:avLst/>
+          </a:prstGeom>
+        </p:spPr>
+      </p:pic>
     </p:spTree>
   </p:cSld>
   <p:clrMapOvr>
